--- a/Arbora Smart Solar Tree.pptx
+++ b/Arbora Smart Solar Tree.pptx
@@ -589,7 +589,7 @@
       </p:grpSpPr>
       <p:sp>
         <p:nvSpPr>
-          <p:cNvPr id="213" name="Shape 213"/>
+          <p:cNvPr id="214" name="Shape 214"/>
           <p:cNvSpPr/>
           <p:nvPr>
             <p:ph type="sldImg"/>
@@ -610,7 +610,7 @@
       </p:sp>
       <p:sp>
         <p:nvSpPr>
-          <p:cNvPr id="214" name="Shape 214"/>
+          <p:cNvPr id="215" name="Shape 215"/>
           <p:cNvSpPr/>
           <p:nvPr>
             <p:ph type="body" sz="quarter" idx="1"/>
@@ -799,7 +799,7 @@
       </p:grpSpPr>
       <p:sp>
         <p:nvSpPr>
-          <p:cNvPr id="99" name="Shape 99"/>
+          <p:cNvPr id="100" name="Shape 100"/>
           <p:cNvSpPr/>
           <p:nvPr>
             <p:ph type="sldImg"/>
@@ -820,7 +820,7 @@
       </p:sp>
       <p:sp>
         <p:nvSpPr>
-          <p:cNvPr id="100" name="Shape 100"/>
+          <p:cNvPr id="101" name="Shape 101"/>
           <p:cNvSpPr/>
           <p:nvPr>
             <p:ph type="body" sz="quarter" idx="1"/>
@@ -869,7 +869,7 @@
       </p:grpSpPr>
       <p:sp>
         <p:nvSpPr>
-          <p:cNvPr id="120" name="Shape 120"/>
+          <p:cNvPr id="121" name="Shape 121"/>
           <p:cNvSpPr/>
           <p:nvPr>
             <p:ph type="sldImg"/>
@@ -890,7 +890,7 @@
       </p:sp>
       <p:sp>
         <p:nvSpPr>
-          <p:cNvPr id="121" name="Shape 121"/>
+          <p:cNvPr id="122" name="Shape 122"/>
           <p:cNvSpPr/>
           <p:nvPr>
             <p:ph type="body" sz="quarter" idx="1"/>
@@ -939,7 +939,7 @@
       </p:grpSpPr>
       <p:sp>
         <p:nvSpPr>
-          <p:cNvPr id="141" name="Shape 141"/>
+          <p:cNvPr id="142" name="Shape 142"/>
           <p:cNvSpPr/>
           <p:nvPr>
             <p:ph type="sldImg"/>
@@ -960,7 +960,7 @@
       </p:sp>
       <p:sp>
         <p:nvSpPr>
-          <p:cNvPr id="142" name="Shape 142"/>
+          <p:cNvPr id="143" name="Shape 143"/>
           <p:cNvSpPr/>
           <p:nvPr>
             <p:ph type="body" sz="quarter" idx="1"/>
@@ -1009,7 +1009,7 @@
       </p:grpSpPr>
       <p:sp>
         <p:nvSpPr>
-          <p:cNvPr id="160" name="Shape 160"/>
+          <p:cNvPr id="161" name="Shape 161"/>
           <p:cNvSpPr/>
           <p:nvPr>
             <p:ph type="sldImg"/>
@@ -1030,7 +1030,7 @@
       </p:sp>
       <p:sp>
         <p:nvSpPr>
-          <p:cNvPr id="161" name="Shape 161"/>
+          <p:cNvPr id="162" name="Shape 162"/>
           <p:cNvSpPr/>
           <p:nvPr>
             <p:ph type="body" sz="quarter" idx="1"/>
@@ -1079,7 +1079,7 @@
       </p:grpSpPr>
       <p:sp>
         <p:nvSpPr>
-          <p:cNvPr id="188" name="Shape 188"/>
+          <p:cNvPr id="189" name="Shape 189"/>
           <p:cNvSpPr/>
           <p:nvPr>
             <p:ph type="sldImg"/>
@@ -1100,7 +1100,7 @@
       </p:sp>
       <p:sp>
         <p:nvSpPr>
-          <p:cNvPr id="189" name="Shape 189"/>
+          <p:cNvPr id="190" name="Shape 190"/>
           <p:cNvSpPr/>
           <p:nvPr>
             <p:ph type="body" sz="quarter" idx="1"/>
@@ -1149,7 +1149,7 @@
       </p:grpSpPr>
       <p:sp>
         <p:nvSpPr>
-          <p:cNvPr id="205" name="Shape 205"/>
+          <p:cNvPr id="206" name="Shape 206"/>
           <p:cNvSpPr/>
           <p:nvPr>
             <p:ph type="sldImg"/>
@@ -1170,7 +1170,7 @@
       </p:sp>
       <p:sp>
         <p:nvSpPr>
-          <p:cNvPr id="206" name="Shape 206"/>
+          <p:cNvPr id="207" name="Shape 207"/>
           <p:cNvSpPr/>
           <p:nvPr>
             <p:ph type="body" sz="quarter" idx="1"/>
@@ -2522,7 +2522,7 @@
       </p:grpSpPr>
       <p:sp>
         <p:nvSpPr>
-          <p:cNvPr id="208" name="Text 0"/>
+          <p:cNvPr id="209" name="Text 0"/>
           <p:cNvSpPr txBox="1"/>
           <p:nvPr/>
         </p:nvSpPr>
@@ -2569,7 +2569,7 @@
       </p:sp>
       <p:sp>
         <p:nvSpPr>
-          <p:cNvPr id="209" name="Text 1"/>
+          <p:cNvPr id="210" name="Text 1"/>
           <p:cNvSpPr txBox="1"/>
           <p:nvPr>
             <p:ph type="title"/>
@@ -2604,7 +2604,7 @@
       </p:sp>
       <p:sp>
         <p:nvSpPr>
-          <p:cNvPr id="210" name="Text 2"/>
+          <p:cNvPr id="211" name="Text 2"/>
           <p:cNvSpPr txBox="1"/>
           <p:nvPr/>
         </p:nvSpPr>
@@ -2651,7 +2651,7 @@
       </p:sp>
       <p:sp>
         <p:nvSpPr>
-          <p:cNvPr id="211" name="Text 3"/>
+          <p:cNvPr id="212" name="Text 3"/>
           <p:cNvSpPr txBox="1"/>
           <p:nvPr/>
         </p:nvSpPr>
@@ -2710,7 +2710,7 @@
       </p:sp>
       <p:pic>
         <p:nvPicPr>
-          <p:cNvPr id="212" name="arbora-mark.svg" descr="arbora-mark.svg"/>
+          <p:cNvPr id="213" name="arbora-mark.svg" descr="arbora-mark.svg"/>
           <p:cNvPicPr>
             <a:picLocks noChangeAspect="1"/>
           </p:cNvPicPr>
@@ -5253,6 +5253,36 @@
           </a:ln>
         </p:spPr>
       </p:pic>
+      <p:pic>
+        <p:nvPicPr>
+          <p:cNvPr id="99" name="Gemini_Generated_Image_2ypba2ypba2ypba2.png" descr="Gemini_Generated_Image_2ypba2ypba2ypba2.png"/>
+          <p:cNvPicPr>
+            <a:picLocks noChangeAspect="1"/>
+          </p:cNvPicPr>
+          <p:nvPr/>
+        </p:nvPicPr>
+        <p:blipFill>
+          <a:blip r:embed="rId5">
+            <a:extLst/>
+          </a:blip>
+          <a:srcRect l="0" t="0" r="49967" b="7592"/>
+          <a:stretch>
+            <a:fillRect/>
+          </a:stretch>
+        </p:blipFill>
+        <p:spPr>
+          <a:xfrm>
+            <a:off x="1048127" y="1301275"/>
+            <a:ext cx="4355286" cy="4387620"/>
+          </a:xfrm>
+          <a:prstGeom prst="rect">
+            <a:avLst/>
+          </a:prstGeom>
+          <a:ln w="12700">
+            <a:miter lim="400000"/>
+          </a:ln>
+        </p:spPr>
+      </p:pic>
     </p:spTree>
   </p:cSld>
   <p:clrMapOvr>
@@ -5288,7 +5318,7 @@
       </p:grpSpPr>
       <p:sp>
         <p:nvSpPr>
-          <p:cNvPr id="102" name="Text 0"/>
+          <p:cNvPr id="103" name="Text 0"/>
           <p:cNvSpPr txBox="1"/>
           <p:nvPr/>
         </p:nvSpPr>
@@ -5335,7 +5365,7 @@
       </p:sp>
       <p:sp>
         <p:nvSpPr>
-          <p:cNvPr id="103" name="Text 1"/>
+          <p:cNvPr id="104" name="Text 1"/>
           <p:cNvSpPr txBox="1"/>
           <p:nvPr>
             <p:ph type="title"/>
@@ -5374,7 +5404,7 @@
       </p:sp>
       <p:sp>
         <p:nvSpPr>
-          <p:cNvPr id="104" name="Shape 2"/>
+          <p:cNvPr id="105" name="Shape 2"/>
           <p:cNvSpPr/>
           <p:nvPr/>
         </p:nvSpPr>
@@ -5413,7 +5443,7 @@
       </p:sp>
       <p:sp>
         <p:nvSpPr>
-          <p:cNvPr id="105" name="Text 3"/>
+          <p:cNvPr id="106" name="Text 3"/>
           <p:cNvSpPr txBox="1"/>
           <p:nvPr/>
         </p:nvSpPr>
@@ -5460,7 +5490,7 @@
       </p:sp>
       <p:sp>
         <p:nvSpPr>
-          <p:cNvPr id="106" name="Text 4"/>
+          <p:cNvPr id="107" name="Text 4"/>
           <p:cNvSpPr txBox="1"/>
           <p:nvPr/>
         </p:nvSpPr>
@@ -5507,7 +5537,7 @@
       </p:sp>
       <p:pic>
         <p:nvPicPr>
-          <p:cNvPr id="107" name="Image 0" descr="Image 0"/>
+          <p:cNvPr id="108" name="Image 0" descr="Image 0"/>
           <p:cNvPicPr>
             <a:picLocks noChangeAspect="1"/>
           </p:cNvPicPr>
@@ -5536,7 +5566,7 @@
       </p:pic>
       <p:sp>
         <p:nvSpPr>
-          <p:cNvPr id="108" name="Shape 5"/>
+          <p:cNvPr id="109" name="Shape 5"/>
           <p:cNvSpPr/>
           <p:nvPr/>
         </p:nvSpPr>
@@ -5575,7 +5605,7 @@
       </p:sp>
       <p:sp>
         <p:nvSpPr>
-          <p:cNvPr id="109" name="Text 6"/>
+          <p:cNvPr id="110" name="Text 6"/>
           <p:cNvSpPr txBox="1"/>
           <p:nvPr/>
         </p:nvSpPr>
@@ -5622,7 +5652,7 @@
       </p:sp>
       <p:sp>
         <p:nvSpPr>
-          <p:cNvPr id="110" name="Text 7"/>
+          <p:cNvPr id="111" name="Text 7"/>
           <p:cNvSpPr txBox="1"/>
           <p:nvPr/>
         </p:nvSpPr>
@@ -5669,7 +5699,7 @@
       </p:sp>
       <p:pic>
         <p:nvPicPr>
-          <p:cNvPr id="111" name="Image 1" descr="Image 1"/>
+          <p:cNvPr id="112" name="Image 1" descr="Image 1"/>
           <p:cNvPicPr>
             <a:picLocks noChangeAspect="1"/>
           </p:cNvPicPr>
@@ -5698,7 +5728,7 @@
       </p:pic>
       <p:sp>
         <p:nvSpPr>
-          <p:cNvPr id="112" name="Shape 8"/>
+          <p:cNvPr id="113" name="Shape 8"/>
           <p:cNvSpPr/>
           <p:nvPr/>
         </p:nvSpPr>
@@ -5737,7 +5767,7 @@
       </p:sp>
       <p:sp>
         <p:nvSpPr>
-          <p:cNvPr id="113" name="Text 9"/>
+          <p:cNvPr id="114" name="Text 9"/>
           <p:cNvSpPr txBox="1"/>
           <p:nvPr/>
         </p:nvSpPr>
@@ -5784,7 +5814,7 @@
       </p:sp>
       <p:sp>
         <p:nvSpPr>
-          <p:cNvPr id="114" name="Text 10"/>
+          <p:cNvPr id="115" name="Text 10"/>
           <p:cNvSpPr txBox="1"/>
           <p:nvPr/>
         </p:nvSpPr>
@@ -5831,7 +5861,7 @@
       </p:sp>
       <p:grpSp>
         <p:nvGrpSpPr>
-          <p:cNvPr id="117" name="Text 11"/>
+          <p:cNvPr id="118" name="Text 11"/>
           <p:cNvGrpSpPr/>
           <p:nvPr/>
         </p:nvGrpSpPr>
@@ -5845,7 +5875,7 @@
         </p:grpSpPr>
         <p:sp>
           <p:nvSpPr>
-            <p:cNvPr id="115" name="Rounded Rectangle"/>
+            <p:cNvPr id="116" name="Rounded Rectangle"/>
             <p:cNvSpPr/>
             <p:nvPr/>
           </p:nvSpPr>
@@ -5889,7 +5919,7 @@
         </p:sp>
         <p:sp>
           <p:nvSpPr>
-            <p:cNvPr id="116" name="Carbon is only removed if the algae are harvested and used. Left to rot in the tank, they release the CO₂ again."/>
+            <p:cNvPr id="117" name="Carbon is only removed if the algae are harvested and used. Left to rot in the tank, they release the CO₂ again."/>
             <p:cNvSpPr txBox="1"/>
             <p:nvPr/>
           </p:nvSpPr>
@@ -5940,7 +5970,7 @@
       </p:grpSp>
       <p:sp>
         <p:nvSpPr>
-          <p:cNvPr id="118" name="Text 13"/>
+          <p:cNvPr id="119" name="Text 13"/>
           <p:cNvSpPr txBox="1"/>
           <p:nvPr/>
         </p:nvSpPr>
@@ -5987,7 +6017,7 @@
       </p:sp>
       <p:pic>
         <p:nvPicPr>
-          <p:cNvPr id="119" name="arbora-logo.svg" descr="arbora-logo.svg"/>
+          <p:cNvPr id="120" name="arbora-logo.svg" descr="arbora-logo.svg"/>
           <p:cNvPicPr>
             <a:picLocks noChangeAspect="1"/>
           </p:cNvPicPr>
@@ -6042,7 +6072,7 @@
       </p:grpSpPr>
       <p:sp>
         <p:nvSpPr>
-          <p:cNvPr id="123" name="Text 0"/>
+          <p:cNvPr id="124" name="Text 0"/>
           <p:cNvSpPr txBox="1"/>
           <p:nvPr/>
         </p:nvSpPr>
@@ -6089,7 +6119,7 @@
       </p:sp>
       <p:sp>
         <p:nvSpPr>
-          <p:cNvPr id="124" name="Text 1"/>
+          <p:cNvPr id="125" name="Text 1"/>
           <p:cNvSpPr txBox="1"/>
           <p:nvPr>
             <p:ph type="title"/>
@@ -6124,7 +6154,7 @@
       </p:sp>
       <p:sp>
         <p:nvSpPr>
-          <p:cNvPr id="125" name="Shape 2"/>
+          <p:cNvPr id="126" name="Shape 2"/>
           <p:cNvSpPr/>
           <p:nvPr/>
         </p:nvSpPr>
@@ -6158,7 +6188,7 @@
       </p:sp>
       <p:sp>
         <p:nvSpPr>
-          <p:cNvPr id="126" name="Text 3"/>
+          <p:cNvPr id="127" name="Text 3"/>
           <p:cNvSpPr txBox="1"/>
           <p:nvPr/>
         </p:nvSpPr>
@@ -6205,7 +6235,7 @@
       </p:sp>
       <p:sp>
         <p:nvSpPr>
-          <p:cNvPr id="127" name="Text 4"/>
+          <p:cNvPr id="128" name="Text 4"/>
           <p:cNvSpPr txBox="1"/>
           <p:nvPr/>
         </p:nvSpPr>
@@ -6252,7 +6282,7 @@
       </p:sp>
       <p:sp>
         <p:nvSpPr>
-          <p:cNvPr id="128" name="Shape 5"/>
+          <p:cNvPr id="129" name="Shape 5"/>
           <p:cNvSpPr/>
           <p:nvPr/>
         </p:nvSpPr>
@@ -6286,7 +6316,7 @@
       </p:sp>
       <p:sp>
         <p:nvSpPr>
-          <p:cNvPr id="129" name="Text 6"/>
+          <p:cNvPr id="130" name="Text 6"/>
           <p:cNvSpPr txBox="1"/>
           <p:nvPr/>
         </p:nvSpPr>
@@ -6333,7 +6363,7 @@
       </p:sp>
       <p:sp>
         <p:nvSpPr>
-          <p:cNvPr id="130" name="Text 7"/>
+          <p:cNvPr id="131" name="Text 7"/>
           <p:cNvSpPr txBox="1"/>
           <p:nvPr/>
         </p:nvSpPr>
@@ -6380,7 +6410,7 @@
       </p:sp>
       <p:sp>
         <p:nvSpPr>
-          <p:cNvPr id="131" name="Shape 8"/>
+          <p:cNvPr id="132" name="Shape 8"/>
           <p:cNvSpPr/>
           <p:nvPr/>
         </p:nvSpPr>
@@ -6414,7 +6444,7 @@
       </p:sp>
       <p:sp>
         <p:nvSpPr>
-          <p:cNvPr id="132" name="Text 9"/>
+          <p:cNvPr id="133" name="Text 9"/>
           <p:cNvSpPr txBox="1"/>
           <p:nvPr/>
         </p:nvSpPr>
@@ -6461,7 +6491,7 @@
       </p:sp>
       <p:sp>
         <p:nvSpPr>
-          <p:cNvPr id="133" name="Text 10"/>
+          <p:cNvPr id="134" name="Text 10"/>
           <p:cNvSpPr txBox="1"/>
           <p:nvPr/>
         </p:nvSpPr>
@@ -6508,7 +6538,7 @@
       </p:sp>
       <p:grpSp>
         <p:nvGrpSpPr>
-          <p:cNvPr id="136" name="Text 11"/>
+          <p:cNvPr id="137" name="Text 11"/>
           <p:cNvGrpSpPr/>
           <p:nvPr/>
         </p:nvGrpSpPr>
@@ -6522,7 +6552,7 @@
         </p:grpSpPr>
         <p:sp>
           <p:nvSpPr>
-            <p:cNvPr id="134" name="Rounded Rectangle"/>
+            <p:cNvPr id="135" name="Rounded Rectangle"/>
             <p:cNvSpPr/>
             <p:nvPr/>
           </p:nvSpPr>
@@ -6569,7 +6599,7 @@
         </p:sp>
         <p:sp>
           <p:nvSpPr>
-            <p:cNvPr id="135" name="Arbora will not out-remove real trees. Its value is local data, clean power, shade and a visible example."/>
+            <p:cNvPr id="136" name="Arbora will not out-remove real trees. Its value is local data, clean power, shade and a visible example."/>
             <p:cNvSpPr txBox="1"/>
             <p:nvPr/>
           </p:nvSpPr>
@@ -6620,7 +6650,7 @@
       </p:grpSp>
       <p:sp>
         <p:nvSpPr>
-          <p:cNvPr id="137" name="Text 12"/>
+          <p:cNvPr id="138" name="Text 12"/>
           <p:cNvSpPr txBox="1"/>
           <p:nvPr/>
         </p:nvSpPr>
@@ -6667,7 +6697,7 @@
       </p:sp>
       <p:sp>
         <p:nvSpPr>
-          <p:cNvPr id="138" name="Text 13"/>
+          <p:cNvPr id="139" name="Text 13"/>
           <p:cNvSpPr txBox="1"/>
           <p:nvPr/>
         </p:nvSpPr>
@@ -6714,7 +6744,7 @@
       </p:sp>
       <p:sp>
         <p:nvSpPr>
-          <p:cNvPr id="139" name="Text 14"/>
+          <p:cNvPr id="140" name="Text 14"/>
           <p:cNvSpPr txBox="1"/>
           <p:nvPr/>
         </p:nvSpPr>
@@ -6761,7 +6791,7 @@
       </p:sp>
       <p:pic>
         <p:nvPicPr>
-          <p:cNvPr id="140" name="pasted-movie.png" descr="pasted-movie.png"/>
+          <p:cNvPr id="141" name="pasted-movie.png" descr="pasted-movie.png"/>
           <p:cNvPicPr>
             <a:picLocks noChangeAspect="1"/>
           </p:cNvPicPr>
@@ -6823,7 +6853,7 @@
       </p:grpSpPr>
       <p:sp>
         <p:nvSpPr>
-          <p:cNvPr id="144" name="Text 0"/>
+          <p:cNvPr id="145" name="Text 0"/>
           <p:cNvSpPr txBox="1"/>
           <p:nvPr/>
         </p:nvSpPr>
@@ -6870,7 +6900,7 @@
       </p:sp>
       <p:sp>
         <p:nvSpPr>
-          <p:cNvPr id="145" name="Text 1"/>
+          <p:cNvPr id="146" name="Text 1"/>
           <p:cNvSpPr txBox="1"/>
           <p:nvPr>
             <p:ph type="title"/>
@@ -6909,7 +6939,7 @@
       </p:sp>
       <p:sp>
         <p:nvSpPr>
-          <p:cNvPr id="146" name="Shape 2"/>
+          <p:cNvPr id="147" name="Shape 2"/>
           <p:cNvSpPr/>
           <p:nvPr/>
         </p:nvSpPr>
@@ -6943,7 +6973,7 @@
       </p:sp>
       <p:sp>
         <p:nvSpPr>
-          <p:cNvPr id="147" name="Text 3"/>
+          <p:cNvPr id="148" name="Text 3"/>
           <p:cNvSpPr txBox="1"/>
           <p:nvPr/>
         </p:nvSpPr>
@@ -6990,7 +7020,7 @@
       </p:sp>
       <p:sp>
         <p:nvSpPr>
-          <p:cNvPr id="148" name="Text 4"/>
+          <p:cNvPr id="149" name="Text 4"/>
           <p:cNvSpPr txBox="1"/>
           <p:nvPr/>
         </p:nvSpPr>
@@ -7037,7 +7067,7 @@
       </p:sp>
       <p:sp>
         <p:nvSpPr>
-          <p:cNvPr id="149" name="Shape 5"/>
+          <p:cNvPr id="150" name="Shape 5"/>
           <p:cNvSpPr/>
           <p:nvPr/>
         </p:nvSpPr>
@@ -7071,7 +7101,7 @@
       </p:sp>
       <p:sp>
         <p:nvSpPr>
-          <p:cNvPr id="150" name="Text 6"/>
+          <p:cNvPr id="151" name="Text 6"/>
           <p:cNvSpPr txBox="1"/>
           <p:nvPr/>
         </p:nvSpPr>
@@ -7118,7 +7148,7 @@
       </p:sp>
       <p:sp>
         <p:nvSpPr>
-          <p:cNvPr id="151" name="Text 7"/>
+          <p:cNvPr id="152" name="Text 7"/>
           <p:cNvSpPr txBox="1"/>
           <p:nvPr/>
         </p:nvSpPr>
@@ -7165,7 +7195,7 @@
       </p:sp>
       <p:sp>
         <p:nvSpPr>
-          <p:cNvPr id="152" name="Shape 8"/>
+          <p:cNvPr id="153" name="Shape 8"/>
           <p:cNvSpPr/>
           <p:nvPr/>
         </p:nvSpPr>
@@ -7199,7 +7229,7 @@
       </p:sp>
       <p:sp>
         <p:nvSpPr>
-          <p:cNvPr id="153" name="Text 9"/>
+          <p:cNvPr id="154" name="Text 9"/>
           <p:cNvSpPr txBox="1"/>
           <p:nvPr/>
         </p:nvSpPr>
@@ -7246,7 +7276,7 @@
       </p:sp>
       <p:sp>
         <p:nvSpPr>
-          <p:cNvPr id="154" name="Text 10"/>
+          <p:cNvPr id="155" name="Text 10"/>
           <p:cNvSpPr txBox="1"/>
           <p:nvPr/>
         </p:nvSpPr>
@@ -7293,7 +7323,7 @@
       </p:sp>
       <p:sp>
         <p:nvSpPr>
-          <p:cNvPr id="155" name="Shape 11"/>
+          <p:cNvPr id="156" name="Shape 11"/>
           <p:cNvSpPr/>
           <p:nvPr/>
         </p:nvSpPr>
@@ -7327,7 +7357,7 @@
       </p:sp>
       <p:sp>
         <p:nvSpPr>
-          <p:cNvPr id="156" name="Text 12"/>
+          <p:cNvPr id="157" name="Text 12"/>
           <p:cNvSpPr txBox="1"/>
           <p:nvPr/>
         </p:nvSpPr>
@@ -7374,7 +7404,7 @@
       </p:sp>
       <p:sp>
         <p:nvSpPr>
-          <p:cNvPr id="157" name="Text 13"/>
+          <p:cNvPr id="158" name="Text 13"/>
           <p:cNvSpPr txBox="1"/>
           <p:nvPr/>
         </p:nvSpPr>
@@ -7421,7 +7451,7 @@
       </p:sp>
       <p:sp>
         <p:nvSpPr>
-          <p:cNvPr id="158" name="Text 15"/>
+          <p:cNvPr id="159" name="Text 15"/>
           <p:cNvSpPr txBox="1"/>
           <p:nvPr/>
         </p:nvSpPr>
@@ -7468,7 +7498,7 @@
       </p:sp>
       <p:pic>
         <p:nvPicPr>
-          <p:cNvPr id="159" name="arbora-logo.svg" descr="arbora-logo.svg"/>
+          <p:cNvPr id="160" name="arbora-logo.svg" descr="arbora-logo.svg"/>
           <p:cNvPicPr>
             <a:picLocks noChangeAspect="1"/>
           </p:cNvPicPr>
@@ -7530,7 +7560,7 @@
       </p:grpSpPr>
       <p:sp>
         <p:nvSpPr>
-          <p:cNvPr id="163" name="Text 0"/>
+          <p:cNvPr id="164" name="Text 0"/>
           <p:cNvSpPr txBox="1"/>
           <p:nvPr/>
         </p:nvSpPr>
@@ -7577,7 +7607,7 @@
       </p:sp>
       <p:sp>
         <p:nvSpPr>
-          <p:cNvPr id="164" name="Text 1"/>
+          <p:cNvPr id="165" name="Text 1"/>
           <p:cNvSpPr txBox="1"/>
           <p:nvPr>
             <p:ph type="title"/>
@@ -7616,7 +7646,7 @@
       </p:sp>
       <p:grpSp>
         <p:nvGrpSpPr>
-          <p:cNvPr id="167" name="Text 2"/>
+          <p:cNvPr id="168" name="Text 2"/>
           <p:cNvGrpSpPr/>
           <p:nvPr/>
         </p:nvGrpSpPr>
@@ -7630,7 +7660,7 @@
         </p:grpSpPr>
         <p:sp>
           <p:nvSpPr>
-            <p:cNvPr id="165" name="Rounded Rectangle"/>
+            <p:cNvPr id="166" name="Rounded Rectangle"/>
             <p:cNvSpPr/>
             <p:nvPr/>
           </p:nvSpPr>
@@ -7674,7 +7704,7 @@
         </p:sp>
         <p:sp>
           <p:nvSpPr>
-            <p:cNvPr id="166" name="Tree sensors"/>
+            <p:cNvPr id="167" name="Tree sensors"/>
             <p:cNvSpPr txBox="1"/>
             <p:nvPr/>
           </p:nvSpPr>
@@ -7725,7 +7755,7 @@
       </p:grpSp>
       <p:pic>
         <p:nvPicPr>
-          <p:cNvPr id="168" name="Image 0" descr="Image 0"/>
+          <p:cNvPr id="169" name="Image 0" descr="Image 0"/>
           <p:cNvPicPr>
             <a:picLocks noChangeAspect="1"/>
           </p:cNvPicPr>
@@ -7754,7 +7784,7 @@
       </p:pic>
       <p:grpSp>
         <p:nvGrpSpPr>
-          <p:cNvPr id="171" name="Text 3"/>
+          <p:cNvPr id="172" name="Text 3"/>
           <p:cNvGrpSpPr/>
           <p:nvPr/>
         </p:nvGrpSpPr>
@@ -7768,7 +7798,7 @@
         </p:grpSpPr>
         <p:sp>
           <p:nvSpPr>
-            <p:cNvPr id="169" name="Rounded Rectangle"/>
+            <p:cNvPr id="170" name="Rounded Rectangle"/>
             <p:cNvSpPr/>
             <p:nvPr/>
           </p:nvSpPr>
@@ -7812,7 +7842,7 @@
         </p:sp>
         <p:sp>
           <p:nvSpPr>
-            <p:cNvPr id="170" name="Cloud database"/>
+            <p:cNvPr id="171" name="Cloud database"/>
             <p:cNvSpPr txBox="1"/>
             <p:nvPr/>
           </p:nvSpPr>
@@ -7863,7 +7893,7 @@
       </p:grpSp>
       <p:pic>
         <p:nvPicPr>
-          <p:cNvPr id="172" name="Image 1" descr="Image 1"/>
+          <p:cNvPr id="173" name="Image 1" descr="Image 1"/>
           <p:cNvPicPr>
             <a:picLocks noChangeAspect="1"/>
           </p:cNvPicPr>
@@ -7892,7 +7922,7 @@
       </p:pic>
       <p:grpSp>
         <p:nvGrpSpPr>
-          <p:cNvPr id="175" name="Text 4"/>
+          <p:cNvPr id="176" name="Text 4"/>
           <p:cNvGrpSpPr/>
           <p:nvPr/>
         </p:nvGrpSpPr>
@@ -7906,7 +7936,7 @@
         </p:grpSpPr>
         <p:sp>
           <p:nvSpPr>
-            <p:cNvPr id="173" name="Rounded Rectangle"/>
+            <p:cNvPr id="174" name="Rounded Rectangle"/>
             <p:cNvSpPr/>
             <p:nvPr/>
           </p:nvSpPr>
@@ -7950,7 +7980,7 @@
         </p:sp>
         <p:sp>
           <p:nvSpPr>
-            <p:cNvPr id="174" name="Website"/>
+            <p:cNvPr id="175" name="Website"/>
             <p:cNvSpPr txBox="1"/>
             <p:nvPr/>
           </p:nvSpPr>
@@ -7997,7 +8027,7 @@
       </p:grpSp>
       <p:pic>
         <p:nvPicPr>
-          <p:cNvPr id="176" name="Image 2" descr="Image 2"/>
+          <p:cNvPr id="177" name="Image 2" descr="Image 2"/>
           <p:cNvPicPr>
             <a:picLocks noChangeAspect="1"/>
           </p:cNvPicPr>
@@ -8026,7 +8056,7 @@
       </p:pic>
       <p:grpSp>
         <p:nvGrpSpPr>
-          <p:cNvPr id="179" name="Text 5"/>
+          <p:cNvPr id="180" name="Text 5"/>
           <p:cNvGrpSpPr/>
           <p:nvPr/>
         </p:nvGrpSpPr>
@@ -8040,7 +8070,7 @@
         </p:grpSpPr>
         <p:sp>
           <p:nvSpPr>
-            <p:cNvPr id="177" name="Rounded Rectangle"/>
+            <p:cNvPr id="178" name="Rounded Rectangle"/>
             <p:cNvSpPr/>
             <p:nvPr/>
           </p:nvSpPr>
@@ -8084,7 +8114,7 @@
         </p:sp>
         <p:sp>
           <p:nvSpPr>
-            <p:cNvPr id="178" name="App"/>
+            <p:cNvPr id="179" name="App"/>
             <p:cNvSpPr txBox="1"/>
             <p:nvPr/>
           </p:nvSpPr>
@@ -8131,7 +8161,7 @@
       </p:grpSp>
       <p:sp>
         <p:nvSpPr>
-          <p:cNvPr id="180" name="Shape 6"/>
+          <p:cNvPr id="181" name="Shape 6"/>
           <p:cNvSpPr/>
           <p:nvPr/>
         </p:nvSpPr>
@@ -8170,7 +8200,7 @@
       </p:sp>
       <p:sp>
         <p:nvSpPr>
-          <p:cNvPr id="181" name="Text 7"/>
+          <p:cNvPr id="182" name="Text 7"/>
           <p:cNvSpPr txBox="1"/>
           <p:nvPr/>
         </p:nvSpPr>
@@ -8217,7 +8247,7 @@
       </p:sp>
       <p:sp>
         <p:nvSpPr>
-          <p:cNvPr id="182" name="Text 8"/>
+          <p:cNvPr id="183" name="Text 8"/>
           <p:cNvSpPr txBox="1"/>
           <p:nvPr/>
         </p:nvSpPr>
@@ -8330,7 +8360,7 @@
       </p:sp>
       <p:sp>
         <p:nvSpPr>
-          <p:cNvPr id="183" name="Shape 9"/>
+          <p:cNvPr id="184" name="Shape 9"/>
           <p:cNvSpPr/>
           <p:nvPr/>
         </p:nvSpPr>
@@ -8369,7 +8399,7 @@
       </p:sp>
       <p:sp>
         <p:nvSpPr>
-          <p:cNvPr id="184" name="Text 10"/>
+          <p:cNvPr id="185" name="Text 10"/>
           <p:cNvSpPr txBox="1"/>
           <p:nvPr/>
         </p:nvSpPr>
@@ -8416,7 +8446,7 @@
       </p:sp>
       <p:sp>
         <p:nvSpPr>
-          <p:cNvPr id="185" name="Text 11"/>
+          <p:cNvPr id="186" name="Text 11"/>
           <p:cNvSpPr txBox="1"/>
           <p:nvPr/>
         </p:nvSpPr>
@@ -8529,7 +8559,7 @@
       </p:sp>
       <p:sp>
         <p:nvSpPr>
-          <p:cNvPr id="186" name="Text 13"/>
+          <p:cNvPr id="187" name="Text 13"/>
           <p:cNvSpPr txBox="1"/>
           <p:nvPr/>
         </p:nvSpPr>
@@ -8576,7 +8606,7 @@
       </p:sp>
       <p:pic>
         <p:nvPicPr>
-          <p:cNvPr id="187" name="arbora-logo.svg" descr="arbora-logo.svg"/>
+          <p:cNvPr id="188" name="arbora-logo.svg" descr="arbora-logo.svg"/>
           <p:cNvPicPr>
             <a:picLocks noChangeAspect="1"/>
           </p:cNvPicPr>
@@ -8638,7 +8668,7 @@
       </p:grpSpPr>
       <p:sp>
         <p:nvSpPr>
-          <p:cNvPr id="191" name="Text 0"/>
+          <p:cNvPr id="192" name="Text 0"/>
           <p:cNvSpPr txBox="1"/>
           <p:nvPr/>
         </p:nvSpPr>
@@ -8685,7 +8715,7 @@
       </p:sp>
       <p:sp>
         <p:nvSpPr>
-          <p:cNvPr id="192" name="Text 1"/>
+          <p:cNvPr id="193" name="Text 1"/>
           <p:cNvSpPr txBox="1"/>
           <p:nvPr>
             <p:ph type="title"/>
@@ -8724,7 +8754,7 @@
       </p:sp>
       <p:sp>
         <p:nvSpPr>
-          <p:cNvPr id="193" name="Shape 2"/>
+          <p:cNvPr id="194" name="Shape 2"/>
           <p:cNvSpPr/>
           <p:nvPr/>
         </p:nvSpPr>
@@ -8761,7 +8791,7 @@
       </p:sp>
       <p:sp>
         <p:nvSpPr>
-          <p:cNvPr id="194" name="Text 3"/>
+          <p:cNvPr id="195" name="Text 3"/>
           <p:cNvSpPr txBox="1"/>
           <p:nvPr/>
         </p:nvSpPr>
@@ -8808,7 +8838,7 @@
       </p:sp>
       <p:sp>
         <p:nvSpPr>
-          <p:cNvPr id="195" name="Text 4"/>
+          <p:cNvPr id="196" name="Text 4"/>
           <p:cNvSpPr txBox="1"/>
           <p:nvPr/>
         </p:nvSpPr>
@@ -8906,7 +8936,7 @@
       </p:sp>
       <p:sp>
         <p:nvSpPr>
-          <p:cNvPr id="196" name="Shape 5"/>
+          <p:cNvPr id="197" name="Shape 5"/>
           <p:cNvSpPr/>
           <p:nvPr/>
         </p:nvSpPr>
@@ -8945,7 +8975,7 @@
       </p:sp>
       <p:sp>
         <p:nvSpPr>
-          <p:cNvPr id="197" name="Text 6"/>
+          <p:cNvPr id="198" name="Text 6"/>
           <p:cNvSpPr txBox="1"/>
           <p:nvPr/>
         </p:nvSpPr>
@@ -8992,7 +9022,7 @@
       </p:sp>
       <p:sp>
         <p:nvSpPr>
-          <p:cNvPr id="198" name="Text 7"/>
+          <p:cNvPr id="199" name="Text 7"/>
           <p:cNvSpPr txBox="1"/>
           <p:nvPr/>
         </p:nvSpPr>
@@ -9083,7 +9113,7 @@
       </p:sp>
       <p:sp>
         <p:nvSpPr>
-          <p:cNvPr id="199" name="Shape 8"/>
+          <p:cNvPr id="200" name="Shape 8"/>
           <p:cNvSpPr/>
           <p:nvPr/>
         </p:nvSpPr>
@@ -9122,7 +9152,7 @@
       </p:sp>
       <p:sp>
         <p:nvSpPr>
-          <p:cNvPr id="200" name="Text 9"/>
+          <p:cNvPr id="201" name="Text 9"/>
           <p:cNvSpPr txBox="1"/>
           <p:nvPr/>
         </p:nvSpPr>
@@ -9169,7 +9199,7 @@
       </p:sp>
       <p:sp>
         <p:nvSpPr>
-          <p:cNvPr id="201" name="Text 10"/>
+          <p:cNvPr id="202" name="Text 10"/>
           <p:cNvSpPr txBox="1"/>
           <p:nvPr/>
         </p:nvSpPr>
@@ -9260,7 +9290,7 @@
       </p:sp>
       <p:sp>
         <p:nvSpPr>
-          <p:cNvPr id="202" name="Text 11"/>
+          <p:cNvPr id="203" name="Text 11"/>
           <p:cNvSpPr txBox="1"/>
           <p:nvPr/>
         </p:nvSpPr>
@@ -9307,7 +9337,7 @@
       </p:sp>
       <p:sp>
         <p:nvSpPr>
-          <p:cNvPr id="203" name="Text 13"/>
+          <p:cNvPr id="204" name="Text 13"/>
           <p:cNvSpPr txBox="1"/>
           <p:nvPr/>
         </p:nvSpPr>
@@ -9354,7 +9384,7 @@
       </p:sp>
       <p:pic>
         <p:nvPicPr>
-          <p:cNvPr id="204" name="arbora-logo.svg" descr="arbora-logo.svg"/>
+          <p:cNvPr id="205" name="arbora-logo.svg" descr="arbora-logo.svg"/>
           <p:cNvPicPr>
             <a:picLocks noChangeAspect="1"/>
           </p:cNvPicPr>
